--- a/docs/main-internal-Major new ppt.pptx
+++ b/docs/main-internal-Major new ppt.pptx
@@ -5,7 +5,7 @@
     <p:sldMasterId id="2147483648" r:id="rId1"/>
   </p:sldMasterIdLst>
   <p:notesMasterIdLst>
-    <p:notesMasterId r:id="rId27"/>
+    <p:notesMasterId r:id="rId28"/>
   </p:notesMasterIdLst>
   <p:sldIdLst>
     <p:sldId id="256" r:id="rId2"/>
@@ -29,24 +29,18 @@
     <p:sldId id="286" r:id="rId20"/>
     <p:sldId id="287" r:id="rId21"/>
     <p:sldId id="288" r:id="rId22"/>
-    <p:sldId id="262" r:id="rId23"/>
+    <p:sldId id="289" r:id="rId23"/>
     <p:sldId id="264" r:id="rId24"/>
-    <p:sldId id="260" r:id="rId25"/>
-    <p:sldId id="271" r:id="rId26"/>
+    <p:sldId id="262" r:id="rId25"/>
+    <p:sldId id="260" r:id="rId26"/>
+    <p:sldId id="271" r:id="rId27"/>
   </p:sldIdLst>
   <p:sldSz cx="18288000" cy="10287000"/>
   <p:notesSz cx="6858000" cy="9144000"/>
   <p:embeddedFontLst>
     <p:embeddedFont>
-      <p:font typeface="Calibri" panose="020F0502020204030204" pitchFamily="34" charset="0"/>
-      <p:regular r:id="rId28"/>
-      <p:bold r:id="rId29"/>
-      <p:italic r:id="rId30"/>
-      <p:boldItalic r:id="rId31"/>
-    </p:embeddedFont>
-    <p:embeddedFont>
       <p:font typeface="Open Sauce Bold" panose="020B0604020202020204" charset="0"/>
-      <p:regular r:id="rId32"/>
+      <p:regular r:id="rId29"/>
     </p:embeddedFont>
   </p:embeddedFontLst>
   <p:defaultTextStyle>
@@ -245,7 +239,7 @@
           <a:p>
             <a:fld id="{41E7A11A-6006-4F19-A262-D293DDD0F5E7}" type="datetimeFigureOut">
               <a:rPr lang="en-IN" smtClean="0"/>
-              <a:t>22-10-2026</a:t>
+              <a:t>24-10-2026</a:t>
             </a:fld>
             <a:endParaRPr lang="en-IN"/>
           </a:p>
@@ -777,7 +771,7 @@
             <a:fld id="{1D8BD707-D9CF-40AE-B4C6-C98DA3205C09}" type="datetimeFigureOut">
               <a:rPr lang="en-US" smtClean="0"/>
               <a:pPr/>
-              <a:t>10/22/2026</a:t>
+              <a:t>10/24/2026</a:t>
             </a:fld>
             <a:endParaRPr lang="en-US"/>
           </a:p>
@@ -942,7 +936,7 @@
             <a:fld id="{1D8BD707-D9CF-40AE-B4C6-C98DA3205C09}" type="datetimeFigureOut">
               <a:rPr lang="en-US" smtClean="0"/>
               <a:pPr/>
-              <a:t>10/22/2026</a:t>
+              <a:t>10/24/2026</a:t>
             </a:fld>
             <a:endParaRPr lang="en-US"/>
           </a:p>
@@ -1117,7 +1111,7 @@
             <a:fld id="{1D8BD707-D9CF-40AE-B4C6-C98DA3205C09}" type="datetimeFigureOut">
               <a:rPr lang="en-US" smtClean="0"/>
               <a:pPr/>
-              <a:t>10/22/2026</a:t>
+              <a:t>10/24/2026</a:t>
             </a:fld>
             <a:endParaRPr lang="en-US"/>
           </a:p>
@@ -1282,7 +1276,7 @@
             <a:fld id="{1D8BD707-D9CF-40AE-B4C6-C98DA3205C09}" type="datetimeFigureOut">
               <a:rPr lang="en-US" smtClean="0"/>
               <a:pPr/>
-              <a:t>10/22/2026</a:t>
+              <a:t>10/24/2026</a:t>
             </a:fld>
             <a:endParaRPr lang="en-US"/>
           </a:p>
@@ -1524,7 +1518,7 @@
             <a:fld id="{1D8BD707-D9CF-40AE-B4C6-C98DA3205C09}" type="datetimeFigureOut">
               <a:rPr lang="en-US" smtClean="0"/>
               <a:pPr/>
-              <a:t>10/22/2026</a:t>
+              <a:t>10/24/2026</a:t>
             </a:fld>
             <a:endParaRPr lang="en-US"/>
           </a:p>
@@ -1806,7 +1800,7 @@
             <a:fld id="{1D8BD707-D9CF-40AE-B4C6-C98DA3205C09}" type="datetimeFigureOut">
               <a:rPr lang="en-US" smtClean="0"/>
               <a:pPr/>
-              <a:t>10/22/2026</a:t>
+              <a:t>10/24/2026</a:t>
             </a:fld>
             <a:endParaRPr lang="en-US"/>
           </a:p>
@@ -2222,7 +2216,7 @@
             <a:fld id="{1D8BD707-D9CF-40AE-B4C6-C98DA3205C09}" type="datetimeFigureOut">
               <a:rPr lang="en-US" smtClean="0"/>
               <a:pPr/>
-              <a:t>10/22/2026</a:t>
+              <a:t>10/24/2026</a:t>
             </a:fld>
             <a:endParaRPr lang="en-US"/>
           </a:p>
@@ -2336,7 +2330,7 @@
             <a:fld id="{1D8BD707-D9CF-40AE-B4C6-C98DA3205C09}" type="datetimeFigureOut">
               <a:rPr lang="en-US" smtClean="0"/>
               <a:pPr/>
-              <a:t>10/22/2026</a:t>
+              <a:t>10/24/2026</a:t>
             </a:fld>
             <a:endParaRPr lang="en-US"/>
           </a:p>
@@ -2428,7 +2422,7 @@
             <a:fld id="{1D8BD707-D9CF-40AE-B4C6-C98DA3205C09}" type="datetimeFigureOut">
               <a:rPr lang="en-US" smtClean="0"/>
               <a:pPr/>
-              <a:t>10/22/2026</a:t>
+              <a:t>10/24/2026</a:t>
             </a:fld>
             <a:endParaRPr lang="en-US"/>
           </a:p>
@@ -2700,7 +2694,7 @@
             <a:fld id="{1D8BD707-D9CF-40AE-B4C6-C98DA3205C09}" type="datetimeFigureOut">
               <a:rPr lang="en-US" smtClean="0"/>
               <a:pPr/>
-              <a:t>10/22/2026</a:t>
+              <a:t>10/24/2026</a:t>
             </a:fld>
             <a:endParaRPr lang="en-US"/>
           </a:p>
@@ -2949,7 +2943,7 @@
             <a:fld id="{1D8BD707-D9CF-40AE-B4C6-C98DA3205C09}" type="datetimeFigureOut">
               <a:rPr lang="en-US" smtClean="0"/>
               <a:pPr/>
-              <a:t>10/22/2026</a:t>
+              <a:t>10/24/2026</a:t>
             </a:fld>
             <a:endParaRPr lang="en-US"/>
           </a:p>
@@ -3157,7 +3151,7 @@
             <a:fld id="{1D8BD707-D9CF-40AE-B4C6-C98DA3205C09}" type="datetimeFigureOut">
               <a:rPr lang="en-US" smtClean="0"/>
               <a:pPr/>
-              <a:t>10/22/2026</a:t>
+              <a:t>10/24/2026</a:t>
             </a:fld>
             <a:endParaRPr lang="en-US"/>
           </a:p>
@@ -12858,157 +12852,89 @@
       </p:grpSpPr>
       <p:sp>
         <p:nvSpPr>
-          <p:cNvPr id="2" name="Freeform 2"/>
-          <p:cNvSpPr/>
-          <p:nvPr/>
-        </p:nvSpPr>
-        <p:spPr>
-          <a:xfrm>
-            <a:off x="0" y="0"/>
-            <a:ext cx="18288000" cy="10287000"/>
-          </a:xfrm>
-          <a:custGeom>
-            <a:avLst/>
-            <a:gdLst/>
-            <a:ahLst/>
-            <a:cxnLst/>
-            <a:rect l="l" t="t" r="r" b="b"/>
-            <a:pathLst>
-              <a:path w="18288000" h="10287000">
-                <a:moveTo>
-                  <a:pt x="0" y="0"/>
-                </a:moveTo>
-                <a:lnTo>
-                  <a:pt x="18288000" y="0"/>
-                </a:lnTo>
-                <a:lnTo>
-                  <a:pt x="18288000" y="10287000"/>
-                </a:lnTo>
-                <a:lnTo>
-                  <a:pt x="0" y="10287000"/>
-                </a:lnTo>
-                <a:lnTo>
-                  <a:pt x="0" y="0"/>
-                </a:lnTo>
-                <a:close/>
-              </a:path>
-            </a:pathLst>
-          </a:custGeom>
-          <a:blipFill>
-            <a:blip r:embed="rId2">
-              <a:alphaModFix amt="50000"/>
-            </a:blip>
-            <a:stretch>
-              <a:fillRect/>
-            </a:stretch>
-          </a:blipFill>
-        </p:spPr>
-        <p:txBody>
-          <a:bodyPr/>
-          <a:lstStyle/>
-          <a:p>
-            <a:endParaRPr lang="en-IN"/>
-          </a:p>
-        </p:txBody>
-      </p:sp>
-      <p:sp>
-        <p:nvSpPr>
-          <p:cNvPr id="3" name="Freeform 3"/>
-          <p:cNvSpPr/>
-          <p:nvPr/>
-        </p:nvSpPr>
-        <p:spPr>
-          <a:xfrm>
-            <a:off x="15710588" y="0"/>
-            <a:ext cx="2759161" cy="1918923"/>
-          </a:xfrm>
-          <a:custGeom>
-            <a:avLst/>
-            <a:gdLst/>
-            <a:ahLst/>
-            <a:cxnLst/>
-            <a:rect l="l" t="t" r="r" b="b"/>
-            <a:pathLst>
-              <a:path w="2759161" h="1918923">
-                <a:moveTo>
-                  <a:pt x="0" y="0"/>
-                </a:moveTo>
-                <a:lnTo>
-                  <a:pt x="2759162" y="0"/>
-                </a:lnTo>
-                <a:lnTo>
-                  <a:pt x="2759162" y="1918923"/>
-                </a:lnTo>
-                <a:lnTo>
-                  <a:pt x="0" y="1918923"/>
-                </a:lnTo>
-                <a:lnTo>
-                  <a:pt x="0" y="0"/>
-                </a:lnTo>
-                <a:close/>
-              </a:path>
-            </a:pathLst>
-          </a:custGeom>
-          <a:blipFill>
-            <a:blip r:embed="rId3"/>
-            <a:stretch>
-              <a:fillRect/>
-            </a:stretch>
-          </a:blipFill>
-        </p:spPr>
-        <p:txBody>
-          <a:bodyPr/>
-          <a:lstStyle/>
-          <a:p>
-            <a:endParaRPr lang="en-IN"/>
-          </a:p>
-        </p:txBody>
-      </p:sp>
-      <p:sp>
-        <p:nvSpPr>
-          <p:cNvPr id="4" name="TextBox 4"/>
+          <p:cNvPr id="2" name="TextBox 1">
+            <a:extLst>
+              <a:ext uri="{FF2B5EF4-FFF2-40B4-BE49-F238E27FC236}">
+                <a16:creationId xmlns:a16="http://schemas.microsoft.com/office/drawing/2014/main" id="{EA533C56-24E9-3D08-100E-6EAAF6DDA976}"/>
+              </a:ext>
+            </a:extLst>
+          </p:cNvPr>
           <p:cNvSpPr txBox="1"/>
           <p:nvPr/>
         </p:nvSpPr>
         <p:spPr>
           <a:xfrm>
-            <a:off x="6510290" y="4169183"/>
-            <a:ext cx="5267419" cy="1160986"/>
+            <a:off x="-381000" y="876300"/>
+            <a:ext cx="5203723" cy="646331"/>
+          </a:xfrm>
+          <a:prstGeom prst="rect">
+            <a:avLst/>
+          </a:prstGeom>
+          <a:noFill/>
+        </p:spPr>
+        <p:txBody>
+          <a:bodyPr wrap="square" rtlCol="0">
+            <a:spAutoFit/>
+          </a:bodyPr>
+          <a:lstStyle/>
+          <a:p>
+            <a:pPr algn="ctr"/>
+            <a:r>
+              <a:rPr lang="en-IN" sz="3600" b="1" dirty="0">
+                <a:latin typeface="Times New Roman" panose="02020603050405020304" pitchFamily="18" charset="0"/>
+                <a:cs typeface="Times New Roman" panose="02020603050405020304" pitchFamily="18" charset="0"/>
+              </a:rPr>
+              <a:t>OUTCOME</a:t>
+            </a:r>
+            <a:endParaRPr lang="en-IN" b="1" dirty="0">
+              <a:latin typeface="Times New Roman" panose="02020603050405020304" pitchFamily="18" charset="0"/>
+              <a:cs typeface="Times New Roman" panose="02020603050405020304" pitchFamily="18" charset="0"/>
+            </a:endParaRPr>
+          </a:p>
+        </p:txBody>
+      </p:sp>
+      <p:pic>
+        <p:nvPicPr>
+          <p:cNvPr id="5" name="Picture 4">
+            <a:extLst>
+              <a:ext uri="{FF2B5EF4-FFF2-40B4-BE49-F238E27FC236}">
+                <a16:creationId xmlns:a16="http://schemas.microsoft.com/office/drawing/2014/main" id="{FE09BED4-509A-199E-1BCF-6FCBD21F2FCB}"/>
+              </a:ext>
+            </a:extLst>
+          </p:cNvPr>
+          <p:cNvPicPr>
+            <a:picLocks noChangeAspect="1"/>
+          </p:cNvPicPr>
+          <p:nvPr/>
+        </p:nvPicPr>
+        <p:blipFill>
+          <a:blip r:embed="rId2">
+            <a:extLst>
+              <a:ext uri="{28A0092B-C50C-407E-A947-70E740481C1C}">
+                <a14:useLocalDpi xmlns:a14="http://schemas.microsoft.com/office/drawing/2010/main" val="0"/>
+              </a:ext>
+            </a:extLst>
+          </a:blip>
+          <a:stretch>
+            <a:fillRect/>
+          </a:stretch>
+        </p:blipFill>
+        <p:spPr>
+          <a:xfrm>
+            <a:off x="1752600" y="1522631"/>
+            <a:ext cx="13639800" cy="7136012"/>
           </a:xfrm>
           <a:prstGeom prst="rect">
             <a:avLst/>
           </a:prstGeom>
         </p:spPr>
-        <p:txBody>
-          <a:bodyPr lIns="0" tIns="0" rIns="0" bIns="0" rtlCol="0" anchor="t">
-            <a:spAutoFit/>
-          </a:bodyPr>
-          <a:lstStyle/>
-          <a:p>
-            <a:pPr algn="ctr">
-              <a:lnSpc>
-                <a:spcPts val="9508"/>
-              </a:lnSpc>
-              <a:spcBef>
-                <a:spcPct val="0"/>
-              </a:spcBef>
-            </a:pPr>
-            <a:r>
-              <a:rPr lang="en-US" sz="6791" b="1">
-                <a:solidFill>
-                  <a:srgbClr val="000000"/>
-                </a:solidFill>
-                <a:latin typeface="Open Sauce Bold"/>
-                <a:ea typeface="Open Sauce Bold"/>
-                <a:cs typeface="Open Sauce Bold"/>
-                <a:sym typeface="Open Sauce Bold"/>
-              </a:rPr>
-              <a:t>THANK YOU</a:t>
-            </a:r>
-          </a:p>
-        </p:txBody>
-      </p:sp>
+      </p:pic>
     </p:spTree>
+    <p:extLst>
+      <p:ext uri="{BB962C8B-B14F-4D97-AF65-F5344CB8AC3E}">
+        <p14:creationId xmlns:p14="http://schemas.microsoft.com/office/powerpoint/2010/main" val="1261140224"/>
+      </p:ext>
+    </p:extLst>
   </p:cSld>
   <p:clrMapOvr>
     <a:masterClrMapping/>
@@ -13338,6 +13264,183 @@
         </p:nvSpPr>
         <p:spPr>
           <a:xfrm>
+            <a:off x="15710588" y="0"/>
+            <a:ext cx="2759161" cy="1918923"/>
+          </a:xfrm>
+          <a:custGeom>
+            <a:avLst/>
+            <a:gdLst/>
+            <a:ahLst/>
+            <a:cxnLst/>
+            <a:rect l="l" t="t" r="r" b="b"/>
+            <a:pathLst>
+              <a:path w="2759161" h="1918923">
+                <a:moveTo>
+                  <a:pt x="0" y="0"/>
+                </a:moveTo>
+                <a:lnTo>
+                  <a:pt x="2759162" y="0"/>
+                </a:lnTo>
+                <a:lnTo>
+                  <a:pt x="2759162" y="1918923"/>
+                </a:lnTo>
+                <a:lnTo>
+                  <a:pt x="0" y="1918923"/>
+                </a:lnTo>
+                <a:lnTo>
+                  <a:pt x="0" y="0"/>
+                </a:lnTo>
+                <a:close/>
+              </a:path>
+            </a:pathLst>
+          </a:custGeom>
+          <a:blipFill>
+            <a:blip r:embed="rId3"/>
+            <a:stretch>
+              <a:fillRect/>
+            </a:stretch>
+          </a:blipFill>
+        </p:spPr>
+        <p:txBody>
+          <a:bodyPr/>
+          <a:lstStyle/>
+          <a:p>
+            <a:endParaRPr lang="en-IN"/>
+          </a:p>
+        </p:txBody>
+      </p:sp>
+      <p:sp>
+        <p:nvSpPr>
+          <p:cNvPr id="4" name="TextBox 4"/>
+          <p:cNvSpPr txBox="1"/>
+          <p:nvPr/>
+        </p:nvSpPr>
+        <p:spPr>
+          <a:xfrm>
+            <a:off x="6510290" y="4169183"/>
+            <a:ext cx="5267419" cy="1160986"/>
+          </a:xfrm>
+          <a:prstGeom prst="rect">
+            <a:avLst/>
+          </a:prstGeom>
+        </p:spPr>
+        <p:txBody>
+          <a:bodyPr lIns="0" tIns="0" rIns="0" bIns="0" rtlCol="0" anchor="t">
+            <a:spAutoFit/>
+          </a:bodyPr>
+          <a:lstStyle/>
+          <a:p>
+            <a:pPr algn="ctr">
+              <a:lnSpc>
+                <a:spcPts val="9508"/>
+              </a:lnSpc>
+              <a:spcBef>
+                <a:spcPct val="0"/>
+              </a:spcBef>
+            </a:pPr>
+            <a:r>
+              <a:rPr lang="en-US" sz="6791" b="1">
+                <a:solidFill>
+                  <a:srgbClr val="000000"/>
+                </a:solidFill>
+                <a:latin typeface="Open Sauce Bold"/>
+                <a:ea typeface="Open Sauce Bold"/>
+                <a:cs typeface="Open Sauce Bold"/>
+                <a:sym typeface="Open Sauce Bold"/>
+              </a:rPr>
+              <a:t>THANK YOU</a:t>
+            </a:r>
+          </a:p>
+        </p:txBody>
+      </p:sp>
+    </p:spTree>
+  </p:cSld>
+  <p:clrMapOvr>
+    <a:masterClrMapping/>
+  </p:clrMapOvr>
+</p:sld>
+</file>
+
+<file path=ppt/slides/slide25.xml><?xml version="1.0" encoding="utf-8"?>
+<p:sld xmlns:a="http://schemas.openxmlformats.org/drawingml/2006/main" xmlns:r="http://schemas.openxmlformats.org/officeDocument/2006/relationships" xmlns:p="http://schemas.openxmlformats.org/presentationml/2006/main">
+  <p:cSld>
+    <p:spTree>
+      <p:nvGrpSpPr>
+        <p:cNvPr id="1" name=""/>
+        <p:cNvGrpSpPr/>
+        <p:nvPr/>
+      </p:nvGrpSpPr>
+      <p:grpSpPr>
+        <a:xfrm>
+          <a:off x="0" y="0"/>
+          <a:ext cx="0" cy="0"/>
+          <a:chOff x="0" y="0"/>
+          <a:chExt cx="0" cy="0"/>
+        </a:xfrm>
+      </p:grpSpPr>
+      <p:sp>
+        <p:nvSpPr>
+          <p:cNvPr id="2" name="Freeform 2"/>
+          <p:cNvSpPr/>
+          <p:nvPr/>
+        </p:nvSpPr>
+        <p:spPr>
+          <a:xfrm>
+            <a:off x="0" y="0"/>
+            <a:ext cx="18288000" cy="10287000"/>
+          </a:xfrm>
+          <a:custGeom>
+            <a:avLst/>
+            <a:gdLst/>
+            <a:ahLst/>
+            <a:cxnLst/>
+            <a:rect l="l" t="t" r="r" b="b"/>
+            <a:pathLst>
+              <a:path w="18288000" h="10287000">
+                <a:moveTo>
+                  <a:pt x="0" y="0"/>
+                </a:moveTo>
+                <a:lnTo>
+                  <a:pt x="18288000" y="0"/>
+                </a:lnTo>
+                <a:lnTo>
+                  <a:pt x="18288000" y="10287000"/>
+                </a:lnTo>
+                <a:lnTo>
+                  <a:pt x="0" y="10287000"/>
+                </a:lnTo>
+                <a:lnTo>
+                  <a:pt x="0" y="0"/>
+                </a:lnTo>
+                <a:close/>
+              </a:path>
+            </a:pathLst>
+          </a:custGeom>
+          <a:blipFill>
+            <a:blip r:embed="rId2">
+              <a:alphaModFix amt="50000"/>
+            </a:blip>
+            <a:stretch>
+              <a:fillRect/>
+            </a:stretch>
+          </a:blipFill>
+        </p:spPr>
+        <p:txBody>
+          <a:bodyPr/>
+          <a:lstStyle/>
+          <a:p>
+            <a:endParaRPr lang="en-IN"/>
+          </a:p>
+        </p:txBody>
+      </p:sp>
+      <p:sp>
+        <p:nvSpPr>
+          <p:cNvPr id="3" name="Freeform 3"/>
+          <p:cNvSpPr/>
+          <p:nvPr/>
+        </p:nvSpPr>
+        <p:spPr>
+          <a:xfrm>
             <a:off x="15528839" y="-106017"/>
             <a:ext cx="2759161" cy="1918923"/>
           </a:xfrm>
@@ -13488,7 +13591,7 @@
 </p:sld>
 </file>
 
-<file path=ppt/slides/slide25.xml><?xml version="1.0" encoding="utf-8"?>
+<file path=ppt/slides/slide26.xml><?xml version="1.0" encoding="utf-8"?>
 <p:sld xmlns:a="http://schemas.openxmlformats.org/drawingml/2006/main" xmlns:r="http://schemas.openxmlformats.org/officeDocument/2006/relationships" xmlns:p="http://schemas.openxmlformats.org/presentationml/2006/main">
   <p:cSld>
     <p:spTree>
